--- a/Documentation/Figures/Operation_Overview.pptx
+++ b/Documentation/Figures/Operation_Overview.pptx
@@ -104,6 +104,11 @@
       </a:defRPr>
     </a:lvl9pPr>
   </p:defaultTextStyle>
+  <p:extLst>
+    <p:ext uri="{EFAFB233-063F-42B5-8137-9DF3F51BA10A}">
+      <p15:sldGuideLst xmlns:p15="http://schemas.microsoft.com/office/powerpoint/2012/main"/>
+    </p:ext>
+  </p:extLst>
 </p:presentation>
 </file>
 
@@ -254,7 +259,7 @@
           <a:p>
             <a:fld id="{CADFBF31-9699-4884-A308-CD5914D4A2D3}" type="datetimeFigureOut">
               <a:rPr lang="en-US" smtClean="0"/>
-              <a:t>4/1/2023</a:t>
+              <a:t>4/12/2023</a:t>
             </a:fld>
             <a:endParaRPr lang="en-US"/>
           </a:p>
@@ -452,7 +457,7 @@
           <a:p>
             <a:fld id="{CADFBF31-9699-4884-A308-CD5914D4A2D3}" type="datetimeFigureOut">
               <a:rPr lang="en-US" smtClean="0"/>
-              <a:t>4/1/2023</a:t>
+              <a:t>4/12/2023</a:t>
             </a:fld>
             <a:endParaRPr lang="en-US"/>
           </a:p>
@@ -660,7 +665,7 @@
           <a:p>
             <a:fld id="{CADFBF31-9699-4884-A308-CD5914D4A2D3}" type="datetimeFigureOut">
               <a:rPr lang="en-US" smtClean="0"/>
-              <a:t>4/1/2023</a:t>
+              <a:t>4/12/2023</a:t>
             </a:fld>
             <a:endParaRPr lang="en-US"/>
           </a:p>
@@ -858,7 +863,7 @@
           <a:p>
             <a:fld id="{CADFBF31-9699-4884-A308-CD5914D4A2D3}" type="datetimeFigureOut">
               <a:rPr lang="en-US" smtClean="0"/>
-              <a:t>4/1/2023</a:t>
+              <a:t>4/12/2023</a:t>
             </a:fld>
             <a:endParaRPr lang="en-US"/>
           </a:p>
@@ -1133,7 +1138,7 @@
           <a:p>
             <a:fld id="{CADFBF31-9699-4884-A308-CD5914D4A2D3}" type="datetimeFigureOut">
               <a:rPr lang="en-US" smtClean="0"/>
-              <a:t>4/1/2023</a:t>
+              <a:t>4/12/2023</a:t>
             </a:fld>
             <a:endParaRPr lang="en-US"/>
           </a:p>
@@ -1398,7 +1403,7 @@
           <a:p>
             <a:fld id="{CADFBF31-9699-4884-A308-CD5914D4A2D3}" type="datetimeFigureOut">
               <a:rPr lang="en-US" smtClean="0"/>
-              <a:t>4/1/2023</a:t>
+              <a:t>4/12/2023</a:t>
             </a:fld>
             <a:endParaRPr lang="en-US"/>
           </a:p>
@@ -1810,7 +1815,7 @@
           <a:p>
             <a:fld id="{CADFBF31-9699-4884-A308-CD5914D4A2D3}" type="datetimeFigureOut">
               <a:rPr lang="en-US" smtClean="0"/>
-              <a:t>4/1/2023</a:t>
+              <a:t>4/12/2023</a:t>
             </a:fld>
             <a:endParaRPr lang="en-US"/>
           </a:p>
@@ -1951,7 +1956,7 @@
           <a:p>
             <a:fld id="{CADFBF31-9699-4884-A308-CD5914D4A2D3}" type="datetimeFigureOut">
               <a:rPr lang="en-US" smtClean="0"/>
-              <a:t>4/1/2023</a:t>
+              <a:t>4/12/2023</a:t>
             </a:fld>
             <a:endParaRPr lang="en-US"/>
           </a:p>
@@ -2064,7 +2069,7 @@
           <a:p>
             <a:fld id="{CADFBF31-9699-4884-A308-CD5914D4A2D3}" type="datetimeFigureOut">
               <a:rPr lang="en-US" smtClean="0"/>
-              <a:t>4/1/2023</a:t>
+              <a:t>4/12/2023</a:t>
             </a:fld>
             <a:endParaRPr lang="en-US"/>
           </a:p>
@@ -2375,7 +2380,7 @@
           <a:p>
             <a:fld id="{CADFBF31-9699-4884-A308-CD5914D4A2D3}" type="datetimeFigureOut">
               <a:rPr lang="en-US" smtClean="0"/>
-              <a:t>4/1/2023</a:t>
+              <a:t>4/12/2023</a:t>
             </a:fld>
             <a:endParaRPr lang="en-US"/>
           </a:p>
@@ -2663,7 +2668,7 @@
           <a:p>
             <a:fld id="{CADFBF31-9699-4884-A308-CD5914D4A2D3}" type="datetimeFigureOut">
               <a:rPr lang="en-US" smtClean="0"/>
-              <a:t>4/1/2023</a:t>
+              <a:t>4/12/2023</a:t>
             </a:fld>
             <a:endParaRPr lang="en-US"/>
           </a:p>
@@ -2904,7 +2909,7 @@
           <a:p>
             <a:fld id="{CADFBF31-9699-4884-A308-CD5914D4A2D3}" type="datetimeFigureOut">
               <a:rPr lang="en-US" smtClean="0"/>
-              <a:t>4/1/2023</a:t>
+              <a:t>4/12/2023</a:t>
             </a:fld>
             <a:endParaRPr lang="en-US"/>
           </a:p>
@@ -3407,69 +3412,22 @@
           </a:fontRef>
         </p:style>
       </p:cxnSp>
-      <p:cxnSp>
-        <p:nvCxnSpPr>
-          <p:cNvPr id="8" name="Straight Connector 7">
-            <a:extLst>
-              <a:ext uri="{FF2B5EF4-FFF2-40B4-BE49-F238E27FC236}">
-                <a16:creationId xmlns:a16="http://schemas.microsoft.com/office/drawing/2014/main" id="{8BFEB4B0-6C8E-D0F9-7500-5CE09C23419A}"/>
-              </a:ext>
-            </a:extLst>
-          </p:cNvPr>
-          <p:cNvCxnSpPr>
-            <a:cxnSpLocks/>
-          </p:cNvCxnSpPr>
+      <p:sp>
+        <p:nvSpPr>
+          <p:cNvPr id="9" name="Rectangle 8">
+            <a:extLst>
+              <a:ext uri="{FF2B5EF4-FFF2-40B4-BE49-F238E27FC236}">
+                <a16:creationId xmlns:a16="http://schemas.microsoft.com/office/drawing/2014/main" id="{C7D802F7-8DE0-1C5D-A536-2D6D0071B275}"/>
+              </a:ext>
+            </a:extLst>
+          </p:cNvPr>
+          <p:cNvSpPr/>
           <p:nvPr/>
-        </p:nvCxnSpPr>
+        </p:nvSpPr>
         <p:spPr>
           <a:xfrm>
-            <a:off x="9190675" y="0"/>
-            <a:ext cx="0" cy="6858000"/>
-          </a:xfrm>
-          <a:prstGeom prst="line">
-            <a:avLst/>
-          </a:prstGeom>
-          <a:ln w="28575" cap="flat" cmpd="sng" algn="ctr">
-            <a:solidFill>
-              <a:schemeClr val="dk1"/>
-            </a:solidFill>
-            <a:prstDash val="dash"/>
-            <a:round/>
-            <a:headEnd type="none" w="med" len="med"/>
-            <a:tailEnd type="none" w="med" len="med"/>
-          </a:ln>
-        </p:spPr>
-        <p:style>
-          <a:lnRef idx="0">
-            <a:scrgbClr r="0" g="0" b="0"/>
-          </a:lnRef>
-          <a:fillRef idx="0">
-            <a:scrgbClr r="0" g="0" b="0"/>
-          </a:fillRef>
-          <a:effectRef idx="0">
-            <a:scrgbClr r="0" g="0" b="0"/>
-          </a:effectRef>
-          <a:fontRef idx="minor">
-            <a:schemeClr val="tx1"/>
-          </a:fontRef>
-        </p:style>
-      </p:cxnSp>
-      <p:sp>
-        <p:nvSpPr>
-          <p:cNvPr id="9" name="Rectangle 8">
-            <a:extLst>
-              <a:ext uri="{FF2B5EF4-FFF2-40B4-BE49-F238E27FC236}">
-                <a16:creationId xmlns:a16="http://schemas.microsoft.com/office/drawing/2014/main" id="{C7D802F7-8DE0-1C5D-A536-2D6D0071B275}"/>
-              </a:ext>
-            </a:extLst>
-          </p:cNvPr>
-          <p:cNvSpPr/>
-          <p:nvPr/>
-        </p:nvSpPr>
-        <p:spPr>
-          <a:xfrm>
-            <a:off x="250697" y="2176528"/>
-            <a:ext cx="1967508" cy="1197736"/>
+            <a:off x="250697" y="2140432"/>
+            <a:ext cx="1967508" cy="1280160"/>
           </a:xfrm>
           <a:prstGeom prst="rect">
             <a:avLst/>
@@ -3496,7 +3454,7 @@
           <a:p>
             <a:r>
               <a:rPr lang="en-US" dirty="0"/>
-              <a:t>Send a request with respective arguments or dataset </a:t>
+              <a:t>1. Send a request with respective arguments or dataset </a:t>
             </a:r>
           </a:p>
         </p:txBody>
@@ -3515,8 +3473,8 @@
         </p:nvSpPr>
         <p:spPr>
           <a:xfrm>
-            <a:off x="3779604" y="2176528"/>
-            <a:ext cx="2179936" cy="1197736"/>
+            <a:off x="3779604" y="2140432"/>
+            <a:ext cx="2179936" cy="1280160"/>
           </a:xfrm>
           <a:prstGeom prst="rect">
             <a:avLst/>
@@ -3543,105 +3501,367 @@
           <a:p>
             <a:r>
               <a:rPr lang="en-US" dirty="0"/>
-              <a:t>Perform consistent hash sharding based on given  arguments or dataset</a:t>
-            </a:r>
-          </a:p>
-        </p:txBody>
-      </p:sp>
-      <p:sp>
-        <p:nvSpPr>
-          <p:cNvPr id="12" name="Rectangle 11">
-            <a:extLst>
-              <a:ext uri="{FF2B5EF4-FFF2-40B4-BE49-F238E27FC236}">
-                <a16:creationId xmlns:a16="http://schemas.microsoft.com/office/drawing/2014/main" id="{8F1E8304-8924-A716-FDF7-C6474EEFF23D}"/>
-              </a:ext>
-            </a:extLst>
-          </p:cNvPr>
-          <p:cNvSpPr/>
+              <a:t>2. Perform consistent hash sharding based on given  arguments or dataset</a:t>
+            </a:r>
+          </a:p>
+        </p:txBody>
+      </p:sp>
+      <p:grpSp>
+        <p:nvGrpSpPr>
+          <p:cNvPr id="7" name="Group 6">
+            <a:extLst>
+              <a:ext uri="{FF2B5EF4-FFF2-40B4-BE49-F238E27FC236}">
+                <a16:creationId xmlns:a16="http://schemas.microsoft.com/office/drawing/2014/main" id="{CBEE7220-5193-6F39-8BF7-6ECBECAB8606}"/>
+              </a:ext>
+            </a:extLst>
+          </p:cNvPr>
+          <p:cNvGrpSpPr>
+            <a:grpSpLocks noGrp="1" noUngrp="1" noRot="1" noMove="1" noResize="1"/>
+          </p:cNvGrpSpPr>
           <p:nvPr/>
-        </p:nvSpPr>
-        <p:spPr>
+        </p:nvGrpSpPr>
+        <p:grpSpPr>
           <a:xfrm>
-            <a:off x="6442467" y="1864215"/>
-            <a:ext cx="2179936" cy="1822362"/>
+            <a:off x="6442467" y="0"/>
+            <a:ext cx="5609164" cy="6858000"/>
+            <a:chOff x="6442467" y="0"/>
+            <a:chExt cx="5609164" cy="6858000"/>
           </a:xfrm>
-          <a:prstGeom prst="rect">
-            <a:avLst/>
-          </a:prstGeom>
-          <a:ln w="28575"/>
-        </p:spPr>
-        <p:style>
-          <a:lnRef idx="2">
-            <a:schemeClr val="dk1"/>
-          </a:lnRef>
-          <a:fillRef idx="1">
-            <a:schemeClr val="lt1"/>
-          </a:fillRef>
-          <a:effectRef idx="0">
-            <a:schemeClr val="dk1"/>
-          </a:effectRef>
-          <a:fontRef idx="minor">
-            <a:schemeClr val="dk1"/>
-          </a:fontRef>
-        </p:style>
-        <p:txBody>
-          <a:bodyPr rtlCol="0" anchor="ctr"/>
-          <a:lstStyle/>
-          <a:p>
-            <a:r>
-              <a:rPr lang="en-US" dirty="0"/>
-              <a:t>Construct pipelines to send multiple requests to corresponding shards and database nodes</a:t>
-            </a:r>
-          </a:p>
-        </p:txBody>
-      </p:sp>
-      <p:sp>
-        <p:nvSpPr>
-          <p:cNvPr id="13" name="Rectangle 12">
-            <a:extLst>
-              <a:ext uri="{FF2B5EF4-FFF2-40B4-BE49-F238E27FC236}">
-                <a16:creationId xmlns:a16="http://schemas.microsoft.com/office/drawing/2014/main" id="{6A250FD4-5A61-F0A8-D922-9F987BEF69A9}"/>
-              </a:ext>
-            </a:extLst>
-          </p:cNvPr>
-          <p:cNvSpPr/>
-          <p:nvPr/>
-        </p:nvSpPr>
-        <p:spPr>
-          <a:xfrm>
-            <a:off x="9971374" y="1864215"/>
-            <a:ext cx="1967509" cy="1822362"/>
-          </a:xfrm>
-          <a:prstGeom prst="rect">
-            <a:avLst/>
-          </a:prstGeom>
-          <a:ln w="28575"/>
-        </p:spPr>
-        <p:style>
-          <a:lnRef idx="2">
-            <a:schemeClr val="dk1"/>
-          </a:lnRef>
-          <a:fillRef idx="1">
-            <a:schemeClr val="lt1"/>
-          </a:fillRef>
-          <a:effectRef idx="0">
-            <a:schemeClr val="dk1"/>
-          </a:effectRef>
-          <a:fontRef idx="minor">
-            <a:schemeClr val="dk1"/>
-          </a:fontRef>
-        </p:style>
-        <p:txBody>
-          <a:bodyPr rtlCol="0" anchor="ctr"/>
-          <a:lstStyle/>
-          <a:p>
-            <a:r>
-              <a:rPr lang="en-US" dirty="0"/>
-              <a:t>Process requests individually in respective shards and database nodes</a:t>
-            </a:r>
-          </a:p>
-        </p:txBody>
-      </p:sp>
+        </p:grpSpPr>
+        <p:cxnSp>
+          <p:nvCxnSpPr>
+            <p:cNvPr id="37" name="Straight Arrow Connector 36">
+              <a:extLst>
+                <a:ext uri="{FF2B5EF4-FFF2-40B4-BE49-F238E27FC236}">
+                  <a16:creationId xmlns:a16="http://schemas.microsoft.com/office/drawing/2014/main" id="{10E431EE-D94D-5D3E-0633-F591E59FCC96}"/>
+                </a:ext>
+              </a:extLst>
+            </p:cNvPr>
+            <p:cNvCxnSpPr>
+              <a:cxnSpLocks noGrp="1" noRot="1" noMove="1" noResize="1" noEditPoints="1" noAdjustHandles="1" noChangeArrowheads="1" noChangeShapeType="1"/>
+            </p:cNvCxnSpPr>
+            <p:nvPr/>
+          </p:nvCxnSpPr>
+          <p:spPr>
+            <a:xfrm>
+              <a:off x="8520133" y="3327030"/>
+              <a:ext cx="1348970" cy="0"/>
+            </a:xfrm>
+            <a:prstGeom prst="straightConnector1">
+              <a:avLst/>
+            </a:prstGeom>
+            <a:ln>
+              <a:solidFill>
+                <a:schemeClr val="accent6">
+                  <a:lumMod val="50000"/>
+                </a:schemeClr>
+              </a:solidFill>
+              <a:headEnd type="none" w="med" len="med"/>
+              <a:tailEnd type="arrow" w="med" len="med"/>
+            </a:ln>
+          </p:spPr>
+          <p:style>
+            <a:lnRef idx="3">
+              <a:schemeClr val="dk1"/>
+            </a:lnRef>
+            <a:fillRef idx="0">
+              <a:schemeClr val="dk1"/>
+            </a:fillRef>
+            <a:effectRef idx="2">
+              <a:schemeClr val="dk1"/>
+            </a:effectRef>
+            <a:fontRef idx="minor">
+              <a:schemeClr val="tx1"/>
+            </a:fontRef>
+          </p:style>
+        </p:cxnSp>
+        <p:cxnSp>
+          <p:nvCxnSpPr>
+            <p:cNvPr id="38" name="Straight Arrow Connector 37">
+              <a:extLst>
+                <a:ext uri="{FF2B5EF4-FFF2-40B4-BE49-F238E27FC236}">
+                  <a16:creationId xmlns:a16="http://schemas.microsoft.com/office/drawing/2014/main" id="{CB71030F-57AB-B584-D6E9-9942C700505E}"/>
+                </a:ext>
+              </a:extLst>
+            </p:cNvPr>
+            <p:cNvCxnSpPr>
+              <a:cxnSpLocks noGrp="1" noRot="1" noMove="1" noResize="1" noEditPoints="1" noAdjustHandles="1" noChangeArrowheads="1" noChangeShapeType="1"/>
+            </p:cNvCxnSpPr>
+            <p:nvPr/>
+          </p:nvCxnSpPr>
+          <p:spPr>
+            <a:xfrm>
+              <a:off x="8520133" y="2573629"/>
+              <a:ext cx="1348970" cy="0"/>
+            </a:xfrm>
+            <a:prstGeom prst="straightConnector1">
+              <a:avLst/>
+            </a:prstGeom>
+            <a:ln>
+              <a:solidFill>
+                <a:schemeClr val="accent6">
+                  <a:lumMod val="50000"/>
+                </a:schemeClr>
+              </a:solidFill>
+              <a:headEnd type="none" w="med" len="med"/>
+              <a:tailEnd type="arrow" w="med" len="med"/>
+            </a:ln>
+          </p:spPr>
+          <p:style>
+            <a:lnRef idx="3">
+              <a:schemeClr val="dk1"/>
+            </a:lnRef>
+            <a:fillRef idx="0">
+              <a:schemeClr val="dk1"/>
+            </a:fillRef>
+            <a:effectRef idx="2">
+              <a:schemeClr val="dk1"/>
+            </a:effectRef>
+            <a:fontRef idx="minor">
+              <a:schemeClr val="tx1"/>
+            </a:fontRef>
+          </p:style>
+        </p:cxnSp>
+        <p:cxnSp>
+          <p:nvCxnSpPr>
+            <p:cNvPr id="42" name="Straight Arrow Connector 41">
+              <a:extLst>
+                <a:ext uri="{FF2B5EF4-FFF2-40B4-BE49-F238E27FC236}">
+                  <a16:creationId xmlns:a16="http://schemas.microsoft.com/office/drawing/2014/main" id="{2C3574EB-7F8B-2DE6-D917-7226BAEA9EB1}"/>
+                </a:ext>
+              </a:extLst>
+            </p:cNvPr>
+            <p:cNvCxnSpPr>
+              <a:cxnSpLocks noGrp="1" noRot="1" noMove="1" noResize="1" noEditPoints="1" noAdjustHandles="1" noChangeArrowheads="1" noChangeShapeType="1"/>
+            </p:cNvCxnSpPr>
+            <p:nvPr/>
+          </p:nvCxnSpPr>
+          <p:spPr>
+            <a:xfrm>
+              <a:off x="8520133" y="2949264"/>
+              <a:ext cx="1348970" cy="0"/>
+            </a:xfrm>
+            <a:prstGeom prst="straightConnector1">
+              <a:avLst/>
+            </a:prstGeom>
+            <a:ln>
+              <a:solidFill>
+                <a:schemeClr val="accent6">
+                  <a:lumMod val="50000"/>
+                </a:schemeClr>
+              </a:solidFill>
+              <a:headEnd type="none" w="med" len="med"/>
+              <a:tailEnd type="arrow" w="med" len="med"/>
+            </a:ln>
+          </p:spPr>
+          <p:style>
+            <a:lnRef idx="3">
+              <a:schemeClr val="dk1"/>
+            </a:lnRef>
+            <a:fillRef idx="0">
+              <a:schemeClr val="dk1"/>
+            </a:fillRef>
+            <a:effectRef idx="2">
+              <a:schemeClr val="dk1"/>
+            </a:effectRef>
+            <a:fontRef idx="minor">
+              <a:schemeClr val="tx1"/>
+            </a:fontRef>
+          </p:style>
+        </p:cxnSp>
+        <p:cxnSp>
+          <p:nvCxnSpPr>
+            <p:cNvPr id="36" name="Straight Arrow Connector 35">
+              <a:extLst>
+                <a:ext uri="{FF2B5EF4-FFF2-40B4-BE49-F238E27FC236}">
+                  <a16:creationId xmlns:a16="http://schemas.microsoft.com/office/drawing/2014/main" id="{E2A8A994-EBB8-6BB6-F473-8334E620F860}"/>
+                </a:ext>
+              </a:extLst>
+            </p:cNvPr>
+            <p:cNvCxnSpPr>
+              <a:cxnSpLocks noGrp="1" noRot="1" noMove="1" noResize="1" noEditPoints="1" noAdjustHandles="1" noChangeArrowheads="1" noChangeShapeType="1"/>
+            </p:cNvCxnSpPr>
+            <p:nvPr/>
+          </p:nvCxnSpPr>
+          <p:spPr>
+            <a:xfrm>
+              <a:off x="8534757" y="2176528"/>
+              <a:ext cx="1334346" cy="0"/>
+            </a:xfrm>
+            <a:prstGeom prst="straightConnector1">
+              <a:avLst/>
+            </a:prstGeom>
+            <a:ln>
+              <a:solidFill>
+                <a:schemeClr val="accent6">
+                  <a:lumMod val="50000"/>
+                </a:schemeClr>
+              </a:solidFill>
+              <a:headEnd type="none" w="med" len="med"/>
+              <a:tailEnd type="arrow" w="med" len="med"/>
+            </a:ln>
+          </p:spPr>
+          <p:style>
+            <a:lnRef idx="3">
+              <a:schemeClr val="dk1"/>
+            </a:lnRef>
+            <a:fillRef idx="0">
+              <a:schemeClr val="dk1"/>
+            </a:fillRef>
+            <a:effectRef idx="2">
+              <a:schemeClr val="dk1"/>
+            </a:effectRef>
+            <a:fontRef idx="minor">
+              <a:schemeClr val="tx1"/>
+            </a:fontRef>
+          </p:style>
+        </p:cxnSp>
+        <p:cxnSp>
+          <p:nvCxnSpPr>
+            <p:cNvPr id="8" name="Straight Connector 7">
+              <a:extLst>
+                <a:ext uri="{FF2B5EF4-FFF2-40B4-BE49-F238E27FC236}">
+                  <a16:creationId xmlns:a16="http://schemas.microsoft.com/office/drawing/2014/main" id="{8BFEB4B0-6C8E-D0F9-7500-5CE09C23419A}"/>
+                </a:ext>
+              </a:extLst>
+            </p:cNvPr>
+            <p:cNvCxnSpPr>
+              <a:cxnSpLocks noGrp="1" noRot="1" noMove="1" noResize="1" noEditPoints="1" noAdjustHandles="1" noChangeArrowheads="1" noChangeShapeType="1"/>
+            </p:cNvCxnSpPr>
+            <p:nvPr/>
+          </p:nvCxnSpPr>
+          <p:spPr>
+            <a:xfrm>
+              <a:off x="9190675" y="0"/>
+              <a:ext cx="0" cy="6858000"/>
+            </a:xfrm>
+            <a:prstGeom prst="line">
+              <a:avLst/>
+            </a:prstGeom>
+            <a:ln w="28575" cap="flat" cmpd="sng" algn="ctr">
+              <a:solidFill>
+                <a:schemeClr val="dk1"/>
+              </a:solidFill>
+              <a:prstDash val="dash"/>
+              <a:round/>
+              <a:headEnd type="none" w="med" len="med"/>
+              <a:tailEnd type="none" w="med" len="med"/>
+            </a:ln>
+          </p:spPr>
+          <p:style>
+            <a:lnRef idx="0">
+              <a:scrgbClr r="0" g="0" b="0"/>
+            </a:lnRef>
+            <a:fillRef idx="0">
+              <a:scrgbClr r="0" g="0" b="0"/>
+            </a:fillRef>
+            <a:effectRef idx="0">
+              <a:scrgbClr r="0" g="0" b="0"/>
+            </a:effectRef>
+            <a:fontRef idx="minor">
+              <a:schemeClr val="tx1"/>
+            </a:fontRef>
+          </p:style>
+        </p:cxnSp>
+        <p:sp>
+          <p:nvSpPr>
+            <p:cNvPr id="12" name="Rectangle 11">
+              <a:extLst>
+                <a:ext uri="{FF2B5EF4-FFF2-40B4-BE49-F238E27FC236}">
+                  <a16:creationId xmlns:a16="http://schemas.microsoft.com/office/drawing/2014/main" id="{8F1E8304-8924-A716-FDF7-C6474EEFF23D}"/>
+                </a:ext>
+              </a:extLst>
+            </p:cNvPr>
+            <p:cNvSpPr>
+              <a:spLocks noGrp="1" noRot="1" noMove="1" noResize="1" noEditPoints="1" noAdjustHandles="1" noChangeArrowheads="1" noChangeShapeType="1"/>
+            </p:cNvSpPr>
+            <p:nvPr/>
+          </p:nvSpPr>
+          <p:spPr>
+            <a:xfrm>
+              <a:off x="6442467" y="1864215"/>
+              <a:ext cx="2194560" cy="1828800"/>
+            </a:xfrm>
+            <a:prstGeom prst="rect">
+              <a:avLst/>
+            </a:prstGeom>
+            <a:ln w="28575"/>
+          </p:spPr>
+          <p:style>
+            <a:lnRef idx="2">
+              <a:schemeClr val="dk1"/>
+            </a:lnRef>
+            <a:fillRef idx="1">
+              <a:schemeClr val="lt1"/>
+            </a:fillRef>
+            <a:effectRef idx="0">
+              <a:schemeClr val="dk1"/>
+            </a:effectRef>
+            <a:fontRef idx="minor">
+              <a:schemeClr val="dk1"/>
+            </a:fontRef>
+          </p:style>
+          <p:txBody>
+            <a:bodyPr rtlCol="0" anchor="ctr"/>
+            <a:lstStyle/>
+            <a:p>
+              <a:r>
+                <a:rPr lang="en-US" dirty="0"/>
+                <a:t>3. Construct pipelines to send multiple requests to corresponding shards and database nodes</a:t>
+              </a:r>
+            </a:p>
+          </p:txBody>
+        </p:sp>
+        <p:sp>
+          <p:nvSpPr>
+            <p:cNvPr id="13" name="Rectangle 12">
+              <a:extLst>
+                <a:ext uri="{FF2B5EF4-FFF2-40B4-BE49-F238E27FC236}">
+                  <a16:creationId xmlns:a16="http://schemas.microsoft.com/office/drawing/2014/main" id="{6A250FD4-5A61-F0A8-D922-9F987BEF69A9}"/>
+                </a:ext>
+              </a:extLst>
+            </p:cNvPr>
+            <p:cNvSpPr>
+              <a:spLocks noGrp="1" noRot="1" noMove="1" noResize="1" noEditPoints="1" noAdjustHandles="1" noChangeArrowheads="1" noChangeShapeType="1"/>
+            </p:cNvSpPr>
+            <p:nvPr/>
+          </p:nvSpPr>
+          <p:spPr>
+            <a:xfrm>
+              <a:off x="9857071" y="1864215"/>
+              <a:ext cx="2194560" cy="1828800"/>
+            </a:xfrm>
+            <a:prstGeom prst="rect">
+              <a:avLst/>
+            </a:prstGeom>
+            <a:ln w="28575"/>
+          </p:spPr>
+          <p:style>
+            <a:lnRef idx="2">
+              <a:schemeClr val="dk1"/>
+            </a:lnRef>
+            <a:fillRef idx="1">
+              <a:schemeClr val="lt1"/>
+            </a:fillRef>
+            <a:effectRef idx="0">
+              <a:schemeClr val="dk1"/>
+            </a:effectRef>
+            <a:fontRef idx="minor">
+              <a:schemeClr val="dk1"/>
+            </a:fontRef>
+          </p:style>
+          <p:txBody>
+            <a:bodyPr rtlCol="0" anchor="ctr"/>
+            <a:lstStyle/>
+            <a:p>
+              <a:r>
+                <a:rPr lang="en-US" dirty="0"/>
+                <a:t>4. Process requests individually in respective shards and database nodes</a:t>
+              </a:r>
+            </a:p>
+          </p:txBody>
+        </p:sp>
+      </p:grpSp>
       <p:grpSp>
         <p:nvGrpSpPr>
           <p:cNvPr id="18" name="Group 17">
@@ -3939,7 +4159,7 @@
         </p:nvCxnSpPr>
         <p:spPr>
           <a:xfrm>
-            <a:off x="2218205" y="2775396"/>
+            <a:off x="2218205" y="2780512"/>
             <a:ext cx="1561399" cy="0"/>
           </a:xfrm>
           <a:prstGeom prst="straightConnector1">
@@ -3980,7 +4200,7 @@
         <p:spPr>
           <a:xfrm>
             <a:off x="9971373" y="4653480"/>
-            <a:ext cx="1967509" cy="1197736"/>
+            <a:ext cx="1967509" cy="1280160"/>
           </a:xfrm>
           <a:prstGeom prst="rect">
             <a:avLst/>
@@ -4008,199 +4228,11 @@
             <a:pPr algn="ctr"/>
             <a:r>
               <a:rPr lang="en-US" dirty="0"/>
-              <a:t>Send results from respective database nodes</a:t>
-            </a:r>
-          </a:p>
-        </p:txBody>
-      </p:sp>
-      <p:cxnSp>
-        <p:nvCxnSpPr>
-          <p:cNvPr id="36" name="Straight Arrow Connector 35">
-            <a:extLst>
-              <a:ext uri="{FF2B5EF4-FFF2-40B4-BE49-F238E27FC236}">
-                <a16:creationId xmlns:a16="http://schemas.microsoft.com/office/drawing/2014/main" id="{E2A8A994-EBB8-6BB6-F473-8334E620F860}"/>
-              </a:ext>
-            </a:extLst>
-          </p:cNvPr>
-          <p:cNvCxnSpPr>
-            <a:cxnSpLocks/>
-          </p:cNvCxnSpPr>
-          <p:nvPr/>
-        </p:nvCxnSpPr>
-        <p:spPr>
-          <a:xfrm>
-            <a:off x="8622403" y="2176528"/>
-            <a:ext cx="1348970" cy="0"/>
-          </a:xfrm>
-          <a:prstGeom prst="straightConnector1">
-            <a:avLst/>
-          </a:prstGeom>
-          <a:ln>
-            <a:solidFill>
-              <a:schemeClr val="accent6">
-                <a:lumMod val="50000"/>
-              </a:schemeClr>
-            </a:solidFill>
-            <a:headEnd type="none" w="med" len="med"/>
-            <a:tailEnd type="arrow" w="med" len="med"/>
-          </a:ln>
-        </p:spPr>
-        <p:style>
-          <a:lnRef idx="3">
-            <a:schemeClr val="dk1"/>
-          </a:lnRef>
-          <a:fillRef idx="0">
-            <a:schemeClr val="dk1"/>
-          </a:fillRef>
-          <a:effectRef idx="2">
-            <a:schemeClr val="dk1"/>
-          </a:effectRef>
-          <a:fontRef idx="minor">
-            <a:schemeClr val="tx1"/>
-          </a:fontRef>
-        </p:style>
-      </p:cxnSp>
-      <p:cxnSp>
-        <p:nvCxnSpPr>
-          <p:cNvPr id="37" name="Straight Arrow Connector 36">
-            <a:extLst>
-              <a:ext uri="{FF2B5EF4-FFF2-40B4-BE49-F238E27FC236}">
-                <a16:creationId xmlns:a16="http://schemas.microsoft.com/office/drawing/2014/main" id="{10E431EE-D94D-5D3E-0633-F591E59FCC96}"/>
-              </a:ext>
-            </a:extLst>
-          </p:cNvPr>
-          <p:cNvCxnSpPr>
-            <a:cxnSpLocks/>
-          </p:cNvCxnSpPr>
-          <p:nvPr/>
-        </p:nvCxnSpPr>
-        <p:spPr>
-          <a:xfrm>
-            <a:off x="8622403" y="3327030"/>
-            <a:ext cx="1348970" cy="0"/>
-          </a:xfrm>
-          <a:prstGeom prst="straightConnector1">
-            <a:avLst/>
-          </a:prstGeom>
-          <a:ln>
-            <a:solidFill>
-              <a:schemeClr val="accent6">
-                <a:lumMod val="50000"/>
-              </a:schemeClr>
-            </a:solidFill>
-            <a:headEnd type="none" w="med" len="med"/>
-            <a:tailEnd type="arrow" w="med" len="med"/>
-          </a:ln>
-        </p:spPr>
-        <p:style>
-          <a:lnRef idx="3">
-            <a:schemeClr val="dk1"/>
-          </a:lnRef>
-          <a:fillRef idx="0">
-            <a:schemeClr val="dk1"/>
-          </a:fillRef>
-          <a:effectRef idx="2">
-            <a:schemeClr val="dk1"/>
-          </a:effectRef>
-          <a:fontRef idx="minor">
-            <a:schemeClr val="tx1"/>
-          </a:fontRef>
-        </p:style>
-      </p:cxnSp>
-      <p:cxnSp>
-        <p:nvCxnSpPr>
-          <p:cNvPr id="38" name="Straight Arrow Connector 37">
-            <a:extLst>
-              <a:ext uri="{FF2B5EF4-FFF2-40B4-BE49-F238E27FC236}">
-                <a16:creationId xmlns:a16="http://schemas.microsoft.com/office/drawing/2014/main" id="{CB71030F-57AB-B584-D6E9-9942C700505E}"/>
-              </a:ext>
-            </a:extLst>
-          </p:cNvPr>
-          <p:cNvCxnSpPr>
-            <a:cxnSpLocks/>
-          </p:cNvCxnSpPr>
-          <p:nvPr/>
-        </p:nvCxnSpPr>
-        <p:spPr>
-          <a:xfrm>
-            <a:off x="8622403" y="2573629"/>
-            <a:ext cx="1348970" cy="0"/>
-          </a:xfrm>
-          <a:prstGeom prst="straightConnector1">
-            <a:avLst/>
-          </a:prstGeom>
-          <a:ln>
-            <a:solidFill>
-              <a:schemeClr val="accent6">
-                <a:lumMod val="50000"/>
-              </a:schemeClr>
-            </a:solidFill>
-            <a:headEnd type="none" w="med" len="med"/>
-            <a:tailEnd type="arrow" w="med" len="med"/>
-          </a:ln>
-        </p:spPr>
-        <p:style>
-          <a:lnRef idx="3">
-            <a:schemeClr val="dk1"/>
-          </a:lnRef>
-          <a:fillRef idx="0">
-            <a:schemeClr val="dk1"/>
-          </a:fillRef>
-          <a:effectRef idx="2">
-            <a:schemeClr val="dk1"/>
-          </a:effectRef>
-          <a:fontRef idx="minor">
-            <a:schemeClr val="tx1"/>
-          </a:fontRef>
-        </p:style>
-      </p:cxnSp>
-      <p:cxnSp>
-        <p:nvCxnSpPr>
-          <p:cNvPr id="42" name="Straight Arrow Connector 41">
-            <a:extLst>
-              <a:ext uri="{FF2B5EF4-FFF2-40B4-BE49-F238E27FC236}">
-                <a16:creationId xmlns:a16="http://schemas.microsoft.com/office/drawing/2014/main" id="{2C3574EB-7F8B-2DE6-D917-7226BAEA9EB1}"/>
-              </a:ext>
-            </a:extLst>
-          </p:cNvPr>
-          <p:cNvCxnSpPr>
-            <a:cxnSpLocks/>
-          </p:cNvCxnSpPr>
-          <p:nvPr/>
-        </p:nvCxnSpPr>
-        <p:spPr>
-          <a:xfrm>
-            <a:off x="8622403" y="2949264"/>
-            <a:ext cx="1348970" cy="0"/>
-          </a:xfrm>
-          <a:prstGeom prst="straightConnector1">
-            <a:avLst/>
-          </a:prstGeom>
-          <a:ln>
-            <a:solidFill>
-              <a:schemeClr val="accent6">
-                <a:lumMod val="50000"/>
-              </a:schemeClr>
-            </a:solidFill>
-            <a:headEnd type="none" w="med" len="med"/>
-            <a:tailEnd type="arrow" w="med" len="med"/>
-          </a:ln>
-        </p:spPr>
-        <p:style>
-          <a:lnRef idx="3">
-            <a:schemeClr val="dk1"/>
-          </a:lnRef>
-          <a:fillRef idx="0">
-            <a:schemeClr val="dk1"/>
-          </a:fillRef>
-          <a:effectRef idx="2">
-            <a:schemeClr val="dk1"/>
-          </a:effectRef>
-          <a:fontRef idx="minor">
-            <a:schemeClr val="tx1"/>
-          </a:fontRef>
-        </p:style>
-      </p:cxnSp>
+              <a:t>5. Send results from respective database nodes</a:t>
+            </a:r>
+          </a:p>
+        </p:txBody>
+      </p:sp>
       <p:cxnSp>
         <p:nvCxnSpPr>
           <p:cNvPr id="45" name="Straight Arrow Connector 44">
@@ -4218,9 +4250,9 @@
           <p:nvPr/>
         </p:nvCxnSpPr>
         <p:spPr>
-          <a:xfrm flipH="1">
-            <a:off x="10955128" y="3686577"/>
-            <a:ext cx="1" cy="966903"/>
+          <a:xfrm>
+            <a:off x="10954351" y="3693015"/>
+            <a:ext cx="777" cy="960465"/>
           </a:xfrm>
           <a:prstGeom prst="straightConnector1">
             <a:avLst/>
@@ -4262,9 +4294,9 @@
           <p:nvPr/>
         </p:nvCxnSpPr>
         <p:spPr>
-          <a:xfrm>
-            <a:off x="5959540" y="2775396"/>
-            <a:ext cx="482927" cy="0"/>
+          <a:xfrm flipV="1">
+            <a:off x="5959540" y="2778615"/>
+            <a:ext cx="482927" cy="1897"/>
           </a:xfrm>
           <a:prstGeom prst="straightConnector1">
             <a:avLst/>
@@ -4304,7 +4336,7 @@
         <p:grpSpPr>
           <a:xfrm>
             <a:off x="6548677" y="4679236"/>
-            <a:ext cx="3422696" cy="1197736"/>
+            <a:ext cx="3422696" cy="1280160"/>
             <a:chOff x="6548677" y="4679236"/>
             <a:chExt cx="3422696" cy="1197736"/>
           </a:xfrm>
@@ -4352,7 +4384,7 @@
               <a:pPr algn="ctr"/>
               <a:r>
                 <a:rPr lang="en-US" dirty="0"/>
-                <a:t>Merge all incoming partial results</a:t>
+                <a:t>6. Merge all incoming partial results</a:t>
               </a:r>
             </a:p>
           </p:txBody>
@@ -4558,13 +4590,14 @@
           <p:cNvCxnSpPr>
             <a:cxnSpLocks/>
             <a:stCxn id="69" idx="1"/>
+            <a:endCxn id="67" idx="3"/>
           </p:cNvCxnSpPr>
           <p:nvPr/>
         </p:nvCxnSpPr>
         <p:spPr>
-          <a:xfrm flipH="1">
-            <a:off x="2218205" y="5284543"/>
-            <a:ext cx="1667612" cy="0"/>
+          <a:xfrm flipH="1" flipV="1">
+            <a:off x="2216422" y="5319316"/>
+            <a:ext cx="1669395" cy="423"/>
           </a:xfrm>
           <a:prstGeom prst="straightConnector1">
             <a:avLst/>
@@ -4604,7 +4637,7 @@
         <p:spPr>
           <a:xfrm>
             <a:off x="248914" y="4679236"/>
-            <a:ext cx="1967508" cy="1197736"/>
+            <a:ext cx="1967508" cy="1280160"/>
           </a:xfrm>
           <a:prstGeom prst="rect">
             <a:avLst/>
@@ -4631,7 +4664,7 @@
           <a:p>
             <a:r>
               <a:rPr lang="en-US" dirty="0"/>
-              <a:t>Receive a response with expected result </a:t>
+              <a:t>8. Receive a response with expected result </a:t>
             </a:r>
           </a:p>
         </p:txBody>
@@ -4650,8 +4683,8 @@
         </p:nvSpPr>
         <p:spPr>
           <a:xfrm>
-            <a:off x="3885817" y="4685675"/>
-            <a:ext cx="1967509" cy="1197736"/>
+            <a:off x="3885817" y="4679659"/>
+            <a:ext cx="1967509" cy="1280160"/>
           </a:xfrm>
           <a:prstGeom prst="rect">
             <a:avLst/>
@@ -4679,7 +4712,7 @@
             <a:pPr algn="ctr"/>
             <a:r>
               <a:rPr lang="en-US" dirty="0"/>
-              <a:t>Send aggregated result</a:t>
+              <a:t>7. Send aggregated result</a:t>
             </a:r>
           </a:p>
         </p:txBody>
@@ -4702,8 +4735,8 @@
         </p:nvCxnSpPr>
         <p:spPr>
           <a:xfrm flipH="1">
-            <a:off x="5853326" y="5278104"/>
-            <a:ext cx="695351" cy="6439"/>
+            <a:off x="5853326" y="5319316"/>
+            <a:ext cx="695351" cy="423"/>
           </a:xfrm>
           <a:prstGeom prst="straightConnector1">
             <a:avLst/>

--- a/Documentation/Figures/Operation_Overview.pptx
+++ b/Documentation/Figures/Operation_Overview.pptx
@@ -259,7 +259,7 @@
           <a:p>
             <a:fld id="{CADFBF31-9699-4884-A308-CD5914D4A2D3}" type="datetimeFigureOut">
               <a:rPr lang="en-US" smtClean="0"/>
-              <a:t>4/12/2023</a:t>
+              <a:t>4/25/2023</a:t>
             </a:fld>
             <a:endParaRPr lang="en-US"/>
           </a:p>
@@ -457,7 +457,7 @@
           <a:p>
             <a:fld id="{CADFBF31-9699-4884-A308-CD5914D4A2D3}" type="datetimeFigureOut">
               <a:rPr lang="en-US" smtClean="0"/>
-              <a:t>4/12/2023</a:t>
+              <a:t>4/25/2023</a:t>
             </a:fld>
             <a:endParaRPr lang="en-US"/>
           </a:p>
@@ -665,7 +665,7 @@
           <a:p>
             <a:fld id="{CADFBF31-9699-4884-A308-CD5914D4A2D3}" type="datetimeFigureOut">
               <a:rPr lang="en-US" smtClean="0"/>
-              <a:t>4/12/2023</a:t>
+              <a:t>4/25/2023</a:t>
             </a:fld>
             <a:endParaRPr lang="en-US"/>
           </a:p>
@@ -863,7 +863,7 @@
           <a:p>
             <a:fld id="{CADFBF31-9699-4884-A308-CD5914D4A2D3}" type="datetimeFigureOut">
               <a:rPr lang="en-US" smtClean="0"/>
-              <a:t>4/12/2023</a:t>
+              <a:t>4/25/2023</a:t>
             </a:fld>
             <a:endParaRPr lang="en-US"/>
           </a:p>
@@ -1138,7 +1138,7 @@
           <a:p>
             <a:fld id="{CADFBF31-9699-4884-A308-CD5914D4A2D3}" type="datetimeFigureOut">
               <a:rPr lang="en-US" smtClean="0"/>
-              <a:t>4/12/2023</a:t>
+              <a:t>4/25/2023</a:t>
             </a:fld>
             <a:endParaRPr lang="en-US"/>
           </a:p>
@@ -1403,7 +1403,7 @@
           <a:p>
             <a:fld id="{CADFBF31-9699-4884-A308-CD5914D4A2D3}" type="datetimeFigureOut">
               <a:rPr lang="en-US" smtClean="0"/>
-              <a:t>4/12/2023</a:t>
+              <a:t>4/25/2023</a:t>
             </a:fld>
             <a:endParaRPr lang="en-US"/>
           </a:p>
@@ -1815,7 +1815,7 @@
           <a:p>
             <a:fld id="{CADFBF31-9699-4884-A308-CD5914D4A2D3}" type="datetimeFigureOut">
               <a:rPr lang="en-US" smtClean="0"/>
-              <a:t>4/12/2023</a:t>
+              <a:t>4/25/2023</a:t>
             </a:fld>
             <a:endParaRPr lang="en-US"/>
           </a:p>
@@ -1956,7 +1956,7 @@
           <a:p>
             <a:fld id="{CADFBF31-9699-4884-A308-CD5914D4A2D3}" type="datetimeFigureOut">
               <a:rPr lang="en-US" smtClean="0"/>
-              <a:t>4/12/2023</a:t>
+              <a:t>4/25/2023</a:t>
             </a:fld>
             <a:endParaRPr lang="en-US"/>
           </a:p>
@@ -2069,7 +2069,7 @@
           <a:p>
             <a:fld id="{CADFBF31-9699-4884-A308-CD5914D4A2D3}" type="datetimeFigureOut">
               <a:rPr lang="en-US" smtClean="0"/>
-              <a:t>4/12/2023</a:t>
+              <a:t>4/25/2023</a:t>
             </a:fld>
             <a:endParaRPr lang="en-US"/>
           </a:p>
@@ -2380,7 +2380,7 @@
           <a:p>
             <a:fld id="{CADFBF31-9699-4884-A308-CD5914D4A2D3}" type="datetimeFigureOut">
               <a:rPr lang="en-US" smtClean="0"/>
-              <a:t>4/12/2023</a:t>
+              <a:t>4/25/2023</a:t>
             </a:fld>
             <a:endParaRPr lang="en-US"/>
           </a:p>
@@ -2668,7 +2668,7 @@
           <a:p>
             <a:fld id="{CADFBF31-9699-4884-A308-CD5914D4A2D3}" type="datetimeFigureOut">
               <a:rPr lang="en-US" smtClean="0"/>
-              <a:t>4/12/2023</a:t>
+              <a:t>4/25/2023</a:t>
             </a:fld>
             <a:endParaRPr lang="en-US"/>
           </a:p>
@@ -2909,7 +2909,7 @@
           <a:p>
             <a:fld id="{CADFBF31-9699-4884-A308-CD5914D4A2D3}" type="datetimeFigureOut">
               <a:rPr lang="en-US" smtClean="0"/>
-              <a:t>4/12/2023</a:t>
+              <a:t>4/25/2023</a:t>
             </a:fld>
             <a:endParaRPr lang="en-US"/>
           </a:p>
@@ -4038,7 +4038,7 @@
           </p:nvSpPr>
           <p:spPr>
             <a:xfrm>
-              <a:off x="5512651" y="4213819"/>
+              <a:off x="5554301" y="4213819"/>
               <a:ext cx="415498" cy="369332"/>
             </a:xfrm>
             <a:prstGeom prst="rect">
